--- a/CPE Electives (1 - 3)/01. Lectures Notebook/000. Presentations & Text Books/01. Presentation Slides/14.1 Logistic Regression.pptx
+++ b/CPE Electives (1 - 3)/01. Lectures Notebook/000. Presentations & Text Books/01. Presentation Slides/14.1 Logistic Regression.pptx
@@ -222,7 +222,7 @@
           <a:p>
             <a:fld id="{5BC7F418-D31A-43EE-A0C4-DE0D40923F98}" type="datetimeFigureOut">
               <a:rPr lang="en-CA" smtClean="0"/>
-              <a:t>2025-04-11</a:t>
+              <a:t>2026-03-06</a:t>
             </a:fld>
             <a:endParaRPr lang="en-CA"/>
           </a:p>
@@ -637,7 +637,7 @@
           <a:p>
             <a:fld id="{8E7E9FA1-3201-4CFE-B59E-2CC3904A385B}" type="datetimeFigureOut">
               <a:rPr lang="ru-RU" smtClean="0"/>
-              <a:t>11.04.2025</a:t>
+              <a:t>06.03.2026</a:t>
             </a:fld>
             <a:endParaRPr lang="ru-RU"/>
           </a:p>
@@ -835,7 +835,7 @@
           <a:p>
             <a:fld id="{8E7E9FA1-3201-4CFE-B59E-2CC3904A385B}" type="datetimeFigureOut">
               <a:rPr lang="ru-RU" smtClean="0"/>
-              <a:t>11.04.2025</a:t>
+              <a:t>06.03.2026</a:t>
             </a:fld>
             <a:endParaRPr lang="ru-RU"/>
           </a:p>
@@ -1043,7 +1043,7 @@
           <a:p>
             <a:fld id="{8E7E9FA1-3201-4CFE-B59E-2CC3904A385B}" type="datetimeFigureOut">
               <a:rPr lang="ru-RU" smtClean="0"/>
-              <a:t>11.04.2025</a:t>
+              <a:t>06.03.2026</a:t>
             </a:fld>
             <a:endParaRPr lang="ru-RU"/>
           </a:p>
@@ -1241,7 +1241,7 @@
           <a:p>
             <a:fld id="{8E7E9FA1-3201-4CFE-B59E-2CC3904A385B}" type="datetimeFigureOut">
               <a:rPr lang="ru-RU" smtClean="0"/>
-              <a:t>11.04.2025</a:t>
+              <a:t>06.03.2026</a:t>
             </a:fld>
             <a:endParaRPr lang="ru-RU"/>
           </a:p>
@@ -1516,7 +1516,7 @@
           <a:p>
             <a:fld id="{8E7E9FA1-3201-4CFE-B59E-2CC3904A385B}" type="datetimeFigureOut">
               <a:rPr lang="ru-RU" smtClean="0"/>
-              <a:t>11.04.2025</a:t>
+              <a:t>06.03.2026</a:t>
             </a:fld>
             <a:endParaRPr lang="ru-RU"/>
           </a:p>
@@ -1781,7 +1781,7 @@
           <a:p>
             <a:fld id="{8E7E9FA1-3201-4CFE-B59E-2CC3904A385B}" type="datetimeFigureOut">
               <a:rPr lang="ru-RU" smtClean="0"/>
-              <a:t>11.04.2025</a:t>
+              <a:t>06.03.2026</a:t>
             </a:fld>
             <a:endParaRPr lang="ru-RU"/>
           </a:p>
@@ -2193,7 +2193,7 @@
           <a:p>
             <a:fld id="{8E7E9FA1-3201-4CFE-B59E-2CC3904A385B}" type="datetimeFigureOut">
               <a:rPr lang="ru-RU" smtClean="0"/>
-              <a:t>11.04.2025</a:t>
+              <a:t>06.03.2026</a:t>
             </a:fld>
             <a:endParaRPr lang="ru-RU"/>
           </a:p>
@@ -2334,7 +2334,7 @@
           <a:p>
             <a:fld id="{8E7E9FA1-3201-4CFE-B59E-2CC3904A385B}" type="datetimeFigureOut">
               <a:rPr lang="ru-RU" smtClean="0"/>
-              <a:t>11.04.2025</a:t>
+              <a:t>06.03.2026</a:t>
             </a:fld>
             <a:endParaRPr lang="ru-RU"/>
           </a:p>
@@ -2447,7 +2447,7 @@
           <a:p>
             <a:fld id="{8E7E9FA1-3201-4CFE-B59E-2CC3904A385B}" type="datetimeFigureOut">
               <a:rPr lang="ru-RU" smtClean="0"/>
-              <a:t>11.04.2025</a:t>
+              <a:t>06.03.2026</a:t>
             </a:fld>
             <a:endParaRPr lang="ru-RU"/>
           </a:p>
@@ -2758,7 +2758,7 @@
           <a:p>
             <a:fld id="{8E7E9FA1-3201-4CFE-B59E-2CC3904A385B}" type="datetimeFigureOut">
               <a:rPr lang="ru-RU" smtClean="0"/>
-              <a:t>11.04.2025</a:t>
+              <a:t>06.03.2026</a:t>
             </a:fld>
             <a:endParaRPr lang="ru-RU"/>
           </a:p>
@@ -3046,7 +3046,7 @@
           <a:p>
             <a:fld id="{8E7E9FA1-3201-4CFE-B59E-2CC3904A385B}" type="datetimeFigureOut">
               <a:rPr lang="ru-RU" smtClean="0"/>
-              <a:t>11.04.2025</a:t>
+              <a:t>06.03.2026</a:t>
             </a:fld>
             <a:endParaRPr lang="ru-RU"/>
           </a:p>
@@ -3287,7 +3287,7 @@
           <a:p>
             <a:fld id="{8E7E9FA1-3201-4CFE-B59E-2CC3904A385B}" type="datetimeFigureOut">
               <a:rPr lang="ru-RU" smtClean="0"/>
-              <a:t>11.04.2025</a:t>
+              <a:t>06.03.2026</a:t>
             </a:fld>
             <a:endParaRPr lang="ru-RU"/>
           </a:p>
@@ -4036,7 +4036,7 @@
         <p:spPr>
           <a:xfrm>
             <a:off x="333523" y="1346271"/>
-            <a:ext cx="10572601" cy="4093428"/>
+            <a:ext cx="10572601" cy="4955203"/>
           </a:xfrm>
           <a:prstGeom prst="rect">
             <a:avLst/>
@@ -4119,18 +4119,7 @@
                 <a:ea typeface="Montserrat" charset="0"/>
                 <a:cs typeface="Montserrat" charset="0"/>
               </a:rPr>
-              <a:t>Example: You took a test with 100 questions and got 90 right, </a:t>
-            </a:r>
-          </a:p>
-          <a:p>
-            <a:pPr lvl="1"/>
-            <a:r>
-              <a:rPr lang="en-CA" sz="2800" dirty="0">
-                <a:latin typeface="Montserrat" charset="0"/>
-                <a:ea typeface="Montserrat" charset="0"/>
-                <a:cs typeface="Montserrat" charset="0"/>
-              </a:rPr>
-              <a:t>Your accuracy is 90% </a:t>
+              <a:t>Example: You took a test with 100 questions and got 90 right, Your accuracy is 90% </a:t>
             </a:r>
           </a:p>
           <a:p>
@@ -5431,9 +5420,7 @@
           <p:cNvGraphicFramePr>
             <a:graphicFrameLocks noGrp="1"/>
           </p:cNvGraphicFramePr>
-          <p:nvPr>
-            <p:extLst/>
-          </p:nvPr>
+          <p:nvPr/>
         </p:nvGraphicFramePr>
         <p:xfrm>
           <a:off x="4449798" y="2314782"/>
@@ -17323,9 +17310,7 @@
           <p:cNvGraphicFramePr>
             <a:graphicFrameLocks noGrp="1"/>
           </p:cNvGraphicFramePr>
-          <p:nvPr>
-            <p:extLst/>
-          </p:nvPr>
+          <p:nvPr/>
         </p:nvGraphicFramePr>
         <p:xfrm>
           <a:off x="4449798" y="2314782"/>
